--- a/assets/ppts/M1.6_Email_SMTP_MIME.pptx
+++ b/assets/ppts/M1.6_Email_SMTP_MIME.pptx
@@ -3142,8 +3142,8 @@
         </p:nvSpPr>
         <p:spPr>
           <a:xfrm>
-            <a:off x="822960" y="1188720"/>
-            <a:ext cx="164592" cy="4480560"/>
+            <a:off x="0" y="0"/>
+            <a:ext cx="12191695" cy="137160"/>
           </a:xfrm>
           <a:prstGeom prst="rect">
             <a:avLst/>
@@ -3179,14 +3179,57 @@
       </p:sp>
       <p:sp>
         <p:nvSpPr>
-          <p:cNvPr id="4" name="TextBox 3"/>
+          <p:cNvPr id="4" name="Rectangle 3"/>
+          <p:cNvSpPr/>
+          <p:nvPr/>
+        </p:nvSpPr>
+        <p:spPr>
+          <a:xfrm>
+            <a:off x="822960" y="1097280"/>
+            <a:ext cx="164592" cy="4663440"/>
+          </a:xfrm>
+          <a:prstGeom prst="rect">
+            <a:avLst/>
+          </a:prstGeom>
+          <a:solidFill>
+            <a:srgbClr val="D97706"/>
+          </a:solidFill>
+          <a:ln>
+            <a:noFill/>
+          </a:ln>
+        </p:spPr>
+        <p:style>
+          <a:lnRef idx="1">
+            <a:schemeClr val="accent1"/>
+          </a:lnRef>
+          <a:fillRef idx="3">
+            <a:schemeClr val="accent1"/>
+          </a:fillRef>
+          <a:effectRef idx="2">
+            <a:schemeClr val="accent1"/>
+          </a:effectRef>
+          <a:fontRef idx="minor">
+            <a:schemeClr val="lt1"/>
+          </a:fontRef>
+        </p:style>
+        <p:txBody>
+          <a:bodyPr rtlCol="0" anchor="ctr"/>
+          <a:lstStyle/>
+          <a:p>
+            <a:pPr algn="ctr"/>
+          </a:p>
+        </p:txBody>
+      </p:sp>
+      <p:sp>
+        <p:nvSpPr>
+          <p:cNvPr id="5" name="TextBox 4"/>
           <p:cNvSpPr txBox="1"/>
           <p:nvPr/>
         </p:nvSpPr>
         <p:spPr>
           <a:xfrm>
-            <a:off x="1280160" y="1097280"/>
-            <a:ext cx="10058400" cy="4663440"/>
+            <a:off x="1234440" y="1005840"/>
+            <a:ext cx="10241280" cy="4846320"/>
           </a:xfrm>
           <a:prstGeom prst="rect">
             <a:avLst/>
@@ -3201,70 +3244,165 @@
           <a:p>
             <a:pPr>
               <a:spcAft>
+                <a:spcPts val="1000"/>
+              </a:spcAft>
+              <a:defRPr b="1" sz="1300">
+                <a:solidFill>
+                  <a:srgbClr val="D97706"/>
+                </a:solidFill>
+              </a:defRPr>
+            </a:pPr>
+            <a:r>
+              <a:t>PCCST501 Computer Networks | KTU 2024 Scheme • MODULE 1 • M1.6</a:t>
+            </a:r>
+          </a:p>
+          <a:p>
+            <a:pPr>
+              <a:spcAft>
                 <a:spcPts val="1200"/>
               </a:spcAft>
-              <a:defRPr b="1" sz="1300">
-                <a:solidFill>
-                  <a:srgbClr val="D97706"/>
+              <a:defRPr b="1" sz="3000">
+                <a:solidFill>
+                  <a:srgbClr val="F8FAFC"/>
                 </a:solidFill>
               </a:defRPr>
             </a:pPr>
             <a:r>
-              <a:t>PCCST501 Computer Networks | KTU 2024 Scheme • MODULE 1 • M1.6</a:t>
+              <a:t>Electronic Mail Architecture &amp; Protocols</a:t>
             </a:r>
           </a:p>
           <a:p>
             <a:pPr>
               <a:spcAft>
-                <a:spcPts val="1400"/>
+                <a:spcPts val="2400"/>
               </a:spcAft>
-              <a:defRPr b="1" sz="3200">
-                <a:solidFill>
-                  <a:srgbClr val="F8FAFC"/>
+              <a:defRPr sz="1600">
+                <a:solidFill>
+                  <a:srgbClr val="94A3B8"/>
                 </a:solidFill>
               </a:defRPr>
             </a:pPr>
             <a:r>
-              <a:t>Electronic Mail (SMTP, POP3, IMAP, MIME)</a:t>
+              <a:t>User Agents (UA), Mail Transfer Agents (MTA), SMTP Push Protocol (Port 25/587), MIME 7-Bit ASCII Encoding, POP3 vs IMAP4 vs Webmail</a:t>
             </a:r>
           </a:p>
           <a:p>
             <a:pPr>
               <a:spcAft>
-                <a:spcPts val="2800"/>
+                <a:spcPts val="300"/>
               </a:spcAft>
-              <a:defRPr sz="1700">
+              <a:defRPr b="1" sz="1350">
+                <a:solidFill>
+                  <a:srgbClr val="E2E8F0"/>
+                </a:solidFill>
+              </a:defRPr>
+            </a:pPr>
+            <a:r>
+              <a:t>Prepared by: Prof. Anju Markose | Assistant Professor, Dept. of CSE | VJCET</a:t>
+            </a:r>
+          </a:p>
+          <a:p>
+            <a:pPr>
+              <a:defRPr sz="1150">
                 <a:solidFill>
                   <a:srgbClr val="94A3B8"/>
                 </a:solidFill>
               </a:defRPr>
             </a:pPr>
             <a:r>
-              <a:t>Email Architecture, Push vs Pull Models, Simple Mail Transfer Protocol, POP3 vs IMAP4 &amp; MIME Encoding</a:t>
-            </a:r>
-          </a:p>
+              <a:t>Viswajyothi College of Engineering and Technology (VJCET), Vazhakulam • KTU S5 CSE</a:t>
+            </a:r>
+          </a:p>
+        </p:txBody>
+      </p:sp>
+      <p:sp>
+        <p:nvSpPr>
+          <p:cNvPr id="6" name="Rounded Rectangle 5"/>
+          <p:cNvSpPr/>
+          <p:nvPr/>
+        </p:nvSpPr>
+        <p:spPr>
+          <a:xfrm>
+            <a:off x="8412480" y="5120640"/>
+            <a:ext cx="3017520" cy="822960"/>
+          </a:xfrm>
+          <a:prstGeom prst="roundRect">
+            <a:avLst/>
+          </a:prstGeom>
+          <a:solidFill>
+            <a:srgbClr val="1E293B"/>
+          </a:solidFill>
+          <a:ln w="12700">
+            <a:solidFill>
+              <a:srgbClr val="0E7490"/>
+            </a:solidFill>
+          </a:ln>
+        </p:spPr>
+        <p:style>
+          <a:lnRef idx="1">
+            <a:schemeClr val="accent1"/>
+          </a:lnRef>
+          <a:fillRef idx="3">
+            <a:schemeClr val="accent1"/>
+          </a:fillRef>
+          <a:effectRef idx="2">
+            <a:schemeClr val="accent1"/>
+          </a:effectRef>
+          <a:fontRef idx="minor">
+            <a:schemeClr val="lt1"/>
+          </a:fontRef>
+        </p:style>
+        <p:txBody>
+          <a:bodyPr rtlCol="0" anchor="ctr"/>
+          <a:lstStyle/>
+          <a:p>
+            <a:pPr algn="ctr"/>
+          </a:p>
+        </p:txBody>
+      </p:sp>
+      <p:sp>
+        <p:nvSpPr>
+          <p:cNvPr id="7" name="TextBox 6"/>
+          <p:cNvSpPr txBox="1"/>
+          <p:nvPr/>
+        </p:nvSpPr>
+        <p:spPr>
+          <a:xfrm>
+            <a:off x="8503920" y="5166360"/>
+            <a:ext cx="2834640" cy="731520"/>
+          </a:xfrm>
+          <a:prstGeom prst="rect">
+            <a:avLst/>
+          </a:prstGeom>
+          <a:noFill/>
+        </p:spPr>
+        <p:txBody>
+          <a:bodyPr wrap="none">
+            <a:spAutoFit/>
+          </a:bodyPr>
+          <a:lstStyle/>
           <a:p>
             <a:pPr>
-              <a:defRPr b="1" sz="1300">
-                <a:solidFill>
-                  <a:srgbClr val="E2E8F0"/>
+              <a:defRPr b="1" sz="1050">
+                <a:solidFill>
+                  <a:srgbClr val="D97706"/>
                 </a:solidFill>
               </a:defRPr>
             </a:pPr>
             <a:r>
-              <a:t>Prepared by: Prof. Anju Markose | Assistant Professor, Dept. of CSE | VJCET</a:t>
+              <a:t>KTU B.Tech Curriculum</a:t>
             </a:r>
           </a:p>
           <a:p>
             <a:pPr>
-              <a:defRPr sz="1100">
-                <a:solidFill>
-                  <a:srgbClr val="94A3B8"/>
+              <a:defRPr sz="950">
+                <a:solidFill>
+                  <a:srgbClr val="F8FAFC"/>
                 </a:solidFill>
               </a:defRPr>
             </a:pPr>
             <a:r>
-              <a:t>Viswajyothi College of Engineering and Technology (VJCET), Vazhakulam</a:t>
+              <a:t>Official Classroom Slide Deck</a:t>
             </a:r>
           </a:p>
         </p:txBody>
@@ -3396,14 +3534,14 @@
           <a:lstStyle/>
           <a:p>
             <a:pPr>
-              <a:defRPr b="1" sz="2300">
+              <a:defRPr b="1" sz="2200">
                 <a:solidFill>
                   <a:srgbClr val="F8FAFC"/>
                 </a:solidFill>
               </a:defRPr>
             </a:pPr>
             <a:r>
-              <a:t>1.6.1 Electronic Mail Architecture &amp; SMTP</a:t>
+              <a:t>1.6.1 Email System Architecture &amp; Message Flow</a:t>
             </a:r>
           </a:p>
         </p:txBody>
@@ -3451,7 +3589,7 @@
         </p:nvSpPr>
         <p:spPr>
           <a:xfrm>
-            <a:off x="731520" y="1280160"/>
+            <a:off x="731520" y="1234440"/>
             <a:ext cx="6858000" cy="4937760"/>
           </a:xfrm>
           <a:prstGeom prst="rect">
@@ -3469,29 +3607,29 @@
               <a:spcAft>
                 <a:spcPts val="200"/>
               </a:spcAft>
-              <a:defRPr b="1" sz="1500">
+              <a:defRPr b="1" sz="1450">
                 <a:solidFill>
                   <a:srgbClr val="0F1E4A"/>
                 </a:solidFill>
               </a:defRPr>
             </a:pPr>
             <a:r>
-              <a:t>• Three Core Components</a:t>
+              <a:t>• Core Components</a:t>
             </a:r>
           </a:p>
           <a:p>
             <a:pPr>
               <a:spcAft>
-                <a:spcPts val="800"/>
+                <a:spcPts val="700"/>
               </a:spcAft>
-              <a:defRPr sz="1300">
-                <a:solidFill>
-                  <a:srgbClr val="1E293B"/>
+              <a:defRPr sz="1250">
+                <a:solidFill>
+                  <a:srgbClr val="0F172A"/>
                 </a:solidFill>
               </a:defRPr>
             </a:pPr>
             <a:r>
-              <a:t>   User Agents (UA: Mail readers like Outlook, Thunderbird), Mail Servers (contain mailboxes &amp; outgoing message spools), and Transfer Protocols.</a:t>
+              <a:t>   Three major components: User Agents (mail clients like Thunderbird, Outlook), Mail Servers (run mailboxes and outgoing message queues), and Mail Transfer Protocols.</a:t>
             </a:r>
           </a:p>
           <a:p>
@@ -3499,29 +3637,29 @@
               <a:spcAft>
                 <a:spcPts val="200"/>
               </a:spcAft>
-              <a:defRPr b="1" sz="1500">
+              <a:defRPr b="1" sz="1450">
                 <a:solidFill>
                   <a:srgbClr val="0F1E4A"/>
                 </a:solidFill>
               </a:defRPr>
             </a:pPr>
             <a:r>
-              <a:t>• SMTP (Simple Mail Transfer Protocol)</a:t>
+              <a:t>• SMTP (Simple Mail Transfer Protocol - RFC 5321)</a:t>
             </a:r>
           </a:p>
           <a:p>
             <a:pPr>
               <a:spcAft>
-                <a:spcPts val="800"/>
+                <a:spcPts val="700"/>
               </a:spcAft>
-              <a:defRPr sz="1300">
-                <a:solidFill>
-                  <a:srgbClr val="1E293B"/>
+              <a:defRPr sz="1250">
+                <a:solidFill>
+                  <a:srgbClr val="0F172A"/>
                 </a:solidFill>
               </a:defRPr>
             </a:pPr>
             <a:r>
-              <a:t>   Standard push protocol for transferring email messages reliably between mail servers over TCP (Port 25 standard, 587 submission).</a:t>
+              <a:t>   Push protocol operating over TCP port 25 (inter-server relay) and port 587 (client message submission with STARTTLS).</a:t>
             </a:r>
           </a:p>
           <a:p>
@@ -3529,29 +3667,29 @@
               <a:spcAft>
                 <a:spcPts val="200"/>
               </a:spcAft>
-              <a:defRPr b="1" sz="1500">
+              <a:defRPr b="1" sz="1450">
                 <a:solidFill>
                   <a:srgbClr val="0F1E4A"/>
                 </a:solidFill>
               </a:defRPr>
             </a:pPr>
             <a:r>
-              <a:t>• SMTP Push Mechanism</a:t>
+              <a:t>• End-to-End Delivery Flow</a:t>
             </a:r>
           </a:p>
           <a:p>
             <a:pPr>
               <a:spcAft>
-                <a:spcPts val="800"/>
+                <a:spcPts val="700"/>
               </a:spcAft>
-              <a:defRPr sz="1300">
-                <a:solidFill>
-                  <a:srgbClr val="1E293B"/>
+              <a:defRPr sz="1250">
+                <a:solidFill>
+                  <a:srgbClr val="0F172A"/>
                 </a:solidFill>
               </a:defRPr>
             </a:pPr>
             <a:r>
-              <a:t>   Sender User Agent pushes email to Sender Mail Server via SMTP $\to$ Sender Mail Server pushes email directly to Recipient Mail Server via SMTP.</a:t>
+              <a:t>   Alice (UA) -&gt; Alice's Mail Server (MTA) -&gt; [Internet Relay via SMTP over TCP] -&gt; Bob's Mail Server (MTA mailbox) -&gt; Bob (UA via POP3/IMAP4/HTTPS).</a:t>
             </a:r>
           </a:p>
           <a:p>
@@ -3559,29 +3697,29 @@
               <a:spcAft>
                 <a:spcPts val="200"/>
               </a:spcAft>
-              <a:defRPr b="1" sz="1500">
+              <a:defRPr b="1" sz="1450">
                 <a:solidFill>
                   <a:srgbClr val="0F1E4A"/>
                 </a:solidFill>
               </a:defRPr>
             </a:pPr>
             <a:r>
-              <a:t>• Connection Phases</a:t>
+              <a:t>• SMTP Push vs Pull Architecture</a:t>
             </a:r>
           </a:p>
           <a:p>
             <a:pPr>
               <a:spcAft>
-                <a:spcPts val="800"/>
+                <a:spcPts val="700"/>
               </a:spcAft>
-              <a:defRPr sz="1300">
-                <a:solidFill>
-                  <a:srgbClr val="1E293B"/>
+              <a:defRPr sz="1250">
+                <a:solidFill>
+                  <a:srgbClr val="0F172A"/>
                 </a:solidFill>
               </a:defRPr>
             </a:pPr>
             <a:r>
-              <a:t>   Three phases: Handshake (`HELO` / `EHLO`), Message Transfer (`MAIL FROM:`, `RCPT TO:`, `DATA`), and Closure (`QUIT`).</a:t>
+              <a:t>   SMTP pushes email from sender to receiver's server. Receiver cannot use SMTP to pull mail to their local client because client may not be online with fixed IP.</a:t>
             </a:r>
           </a:p>
           <a:p>
@@ -3589,29 +3727,29 @@
               <a:spcAft>
                 <a:spcPts val="200"/>
               </a:spcAft>
-              <a:defRPr b="1" sz="1500">
+              <a:defRPr b="1" sz="1450">
                 <a:solidFill>
                   <a:srgbClr val="0F1E4A"/>
                 </a:solidFill>
               </a:defRPr>
             </a:pPr>
             <a:r>
-              <a:t>• 7-Bit ASCII Limitation</a:t>
+              <a:t>• SMTP Message Format (RFC 5322)</a:t>
             </a:r>
           </a:p>
           <a:p>
             <a:pPr>
               <a:spcAft>
-                <a:spcPts val="800"/>
+                <a:spcPts val="700"/>
               </a:spcAft>
-              <a:defRPr sz="1300">
-                <a:solidFill>
-                  <a:srgbClr val="1E293B"/>
+              <a:defRPr sz="1250">
+                <a:solidFill>
+                  <a:srgbClr val="0F172A"/>
                 </a:solidFill>
               </a:defRPr>
             </a:pPr>
             <a:r>
-              <a:t>   Original SMTP body restricted to plain 7-bit ASCII characters. Multimedia require MIME extensions.</a:t>
+              <a:t>   Header lines (`From:`, `To:`, `Subject:`, `Date:`) separated from Message Body by a blank line `\r\n`. Handled as 7-bit ASCII text.</a:t>
             </a:r>
           </a:p>
         </p:txBody>
@@ -3624,14 +3762,14 @@
         </p:nvSpPr>
         <p:spPr>
           <a:xfrm>
-            <a:off x="7955279" y="1280160"/>
-            <a:ext cx="3566160" cy="4846320"/>
+            <a:off x="7955279" y="1234440"/>
+            <a:ext cx="3566160" cy="4892040"/>
           </a:xfrm>
           <a:prstGeom prst="roundRect">
             <a:avLst/>
           </a:prstGeom>
           <a:solidFill>
-            <a:srgbClr val="F1F5F9"/>
+            <a:srgbClr val="F8FAFC"/>
           </a:solidFill>
           <a:ln w="19050">
             <a:solidFill>
@@ -3669,7 +3807,7 @@
         </p:nvSpPr>
         <p:spPr>
           <a:xfrm>
-            <a:off x="8138160" y="1417320"/>
+            <a:off x="8138160" y="1371600"/>
             <a:ext cx="3200400" cy="4572000"/>
           </a:xfrm>
           <a:prstGeom prst="rect">
@@ -3694,7 +3832,7 @@
               </a:defRPr>
             </a:pPr>
             <a:r>
-              <a:t>SMTP Commands</a:t>
+              <a:t>SMTP Command Flow</a:t>
             </a:r>
           </a:p>
           <a:p>
@@ -3704,12 +3842,12 @@
               </a:spcAft>
               <a:defRPr sz="1200">
                 <a:solidFill>
-                  <a:srgbClr val="1E293B"/>
+                  <a:srgbClr val="0F172A"/>
                 </a:solidFill>
               </a:defRPr>
             </a:pPr>
             <a:r>
-              <a:t>→ HELO / EHLO: Client greeting</a:t>
+              <a:t>→ HELO / EHLO: Client intro</a:t>
             </a:r>
           </a:p>
           <a:p>
@@ -3719,12 +3857,12 @@
               </a:spcAft>
               <a:defRPr sz="1200">
                 <a:solidFill>
-                  <a:srgbClr val="1E293B"/>
+                  <a:srgbClr val="0F172A"/>
                 </a:solidFill>
               </a:defRPr>
             </a:pPr>
             <a:r>
-              <a:t>→ MAIL FROM: Identifies sender</a:t>
+              <a:t>→ MAIL FROM: Sender envelope</a:t>
             </a:r>
           </a:p>
           <a:p>
@@ -3734,12 +3872,12 @@
               </a:spcAft>
               <a:defRPr sz="1200">
                 <a:solidFill>
-                  <a:srgbClr val="1E293B"/>
+                  <a:srgbClr val="0F172A"/>
                 </a:solidFill>
               </a:defRPr>
             </a:pPr>
             <a:r>
-              <a:t>→ RCPT TO: Identifies recipient</a:t>
+              <a:t>→ RCPT TO: Recipient address</a:t>
             </a:r>
           </a:p>
           <a:p>
@@ -3749,12 +3887,12 @@
               </a:spcAft>
               <a:defRPr sz="1200">
                 <a:solidFill>
-                  <a:srgbClr val="1E293B"/>
+                  <a:srgbClr val="0F172A"/>
                 </a:solidFill>
               </a:defRPr>
             </a:pPr>
             <a:r>
-              <a:t>→ DATA: Begins email body text</a:t>
+              <a:t>→ DATA: Start message payload</a:t>
             </a:r>
           </a:p>
           <a:p>
@@ -3764,12 +3902,12 @@
               </a:spcAft>
               <a:defRPr sz="1200">
                 <a:solidFill>
-                  <a:srgbClr val="1E293B"/>
+                  <a:srgbClr val="0F172A"/>
                 </a:solidFill>
               </a:defRPr>
             </a:pPr>
             <a:r>
-              <a:t>→ . (Single dot on line): Ends body</a:t>
+              <a:t>→ . (Single period): End of data</a:t>
             </a:r>
           </a:p>
           <a:p>
@@ -3779,12 +3917,12 @@
               </a:spcAft>
               <a:defRPr sz="1200">
                 <a:solidFill>
-                  <a:srgbClr val="1E293B"/>
+                  <a:srgbClr val="0F172A"/>
                 </a:solidFill>
               </a:defRPr>
             </a:pPr>
             <a:r>
-              <a:t>→ QUIT: Terminates connection</a:t>
+              <a:t>→ QUIT: Terminate TCP session</a:t>
             </a:r>
           </a:p>
         </p:txBody>
@@ -3797,8 +3935,8 @@
         </p:nvSpPr>
         <p:spPr>
           <a:xfrm>
-            <a:off x="731520" y="6309360"/>
-            <a:ext cx="10789920" cy="365760"/>
+            <a:off x="731520" y="6327648"/>
+            <a:ext cx="10789920" cy="320040"/>
           </a:xfrm>
           <a:prstGeom prst="rect">
             <a:avLst/>
@@ -3820,6 +3958,41 @@
             </a:pPr>
             <a:r>
               <a:t>PCCST501 Computer Networks | KTU 2024 Scheme | Prof. Anju Markose | Assistant Professor, Dept. of CSE | VJCET</a:t>
+            </a:r>
+          </a:p>
+        </p:txBody>
+      </p:sp>
+      <p:sp>
+        <p:nvSpPr>
+          <p:cNvPr id="10" name="TextBox 9"/>
+          <p:cNvSpPr txBox="1"/>
+          <p:nvPr/>
+        </p:nvSpPr>
+        <p:spPr>
+          <a:xfrm>
+            <a:off x="6858000" y="6327648"/>
+            <a:ext cx="4572000" cy="320040"/>
+          </a:xfrm>
+          <a:prstGeom prst="rect">
+            <a:avLst/>
+          </a:prstGeom>
+          <a:noFill/>
+        </p:spPr>
+        <p:txBody>
+          <a:bodyPr wrap="none">
+            <a:spAutoFit/>
+          </a:bodyPr>
+          <a:lstStyle/>
+          <a:p>
+            <a:pPr algn="r">
+              <a:defRPr sz="950">
+                <a:solidFill>
+                  <a:srgbClr val="64748B"/>
+                </a:solidFill>
+              </a:defRPr>
+            </a:pPr>
+            <a:r>
+              <a:t>Dept. of CSE, VJCET</a:t>
             </a:r>
           </a:p>
         </p:txBody>
@@ -3951,14 +4124,14 @@
           <a:lstStyle/>
           <a:p>
             <a:pPr>
-              <a:defRPr b="1" sz="2300">
+              <a:defRPr b="1" sz="2200">
                 <a:solidFill>
                   <a:srgbClr val="F8FAFC"/>
                 </a:solidFill>
               </a:defRPr>
             </a:pPr>
             <a:r>
-              <a:t>1.6.2 Mail Access Protocols: POP3 vs IMAP4</a:t>
+              <a:t>1.6.2 MIME Extensions &amp; Mail Access: POP3 vs IMAP4</a:t>
             </a:r>
           </a:p>
         </p:txBody>
@@ -3993,7 +4166,7 @@
               </a:defRPr>
             </a:pPr>
             <a:r>
-              <a:t>M1.6 POP3 VS IMAP4</a:t>
+              <a:t>M1.6 MIME &amp; ACCESS PROTOCOLS</a:t>
             </a:r>
           </a:p>
         </p:txBody>
@@ -4006,18 +4179,18 @@
         </p:nvSpPr>
         <p:spPr>
           <a:xfrm>
-            <a:off x="731520" y="1280160"/>
-            <a:ext cx="5212080" cy="4846320"/>
+            <a:off x="731520" y="1234440"/>
+            <a:ext cx="5212080" cy="4892040"/>
           </a:xfrm>
           <a:prstGeom prst="roundRect">
             <a:avLst/>
           </a:prstGeom>
           <a:solidFill>
-            <a:srgbClr val="F1F5F9"/>
+            <a:srgbClr val="F8FAFC"/>
           </a:solidFill>
           <a:ln w="19050">
             <a:solidFill>
-              <a:srgbClr val="0E7490"/>
+              <a:srgbClr val="0F1E4A"/>
             </a:solidFill>
           </a:ln>
         </p:spPr>
@@ -4051,7 +4224,7 @@
         </p:nvSpPr>
         <p:spPr>
           <a:xfrm>
-            <a:off x="914400" y="1417320"/>
+            <a:off x="914400" y="1371600"/>
             <a:ext cx="4846320" cy="4572000"/>
           </a:xfrm>
           <a:prstGeom prst="rect">
@@ -4067,91 +4240,61 @@
           <a:p>
             <a:pPr>
               <a:spcAft>
-                <a:spcPts val="1200"/>
+                <a:spcPts val="1000"/>
               </a:spcAft>
-              <a:defRPr b="1" sz="1600">
+              <a:defRPr b="1" sz="1550">
                 <a:solidFill>
                   <a:srgbClr val="0F1E4A"/>
                 </a:solidFill>
               </a:defRPr>
             </a:pPr>
             <a:r>
-              <a:t>POP3 (Post Office Protocol v3 - Port 110)</a:t>
+              <a:t>MIME (Multipurpose Internet Mail Extensions)</a:t>
             </a:r>
           </a:p>
           <a:p>
             <a:pPr>
               <a:spcAft>
-                <a:spcPts val="600"/>
+                <a:spcPts val="500"/>
               </a:spcAft>
-              <a:defRPr sz="1250">
-                <a:solidFill>
-                  <a:srgbClr val="1E293B"/>
+              <a:defRPr sz="1200">
+                <a:solidFill>
+                  <a:srgbClr val="0F172A"/>
                 </a:solidFill>
               </a:defRPr>
             </a:pPr>
             <a:r>
-              <a:t>• Paradigm: Download-and-delete / Download-and-keep mode</a:t>
+              <a:t>• Purpose: Allows non-ASCII binary data (images, audio, PDFs, attachments) over 7-bit ASCII SMTP</a:t>
             </a:r>
           </a:p>
           <a:p>
             <a:pPr>
               <a:spcAft>
-                <a:spcPts val="600"/>
+                <a:spcPts val="500"/>
               </a:spcAft>
-              <a:defRPr sz="1250">
-                <a:solidFill>
-                  <a:srgbClr val="1E293B"/>
+              <a:defRPr sz="1200">
+                <a:solidFill>
+                  <a:srgbClr val="0F172A"/>
                 </a:solidFill>
               </a:defRPr>
             </a:pPr>
             <a:r>
-              <a:t>• Folder Management: Messages downloaded locally; cannot create server folders</a:t>
+              <a:t>• MIME Headers: `MIME-Version: 1.0`, `Content-Type: multipart/mixed; boundary=...`, `Content-Transfer-Encoding: base64`</a:t>
             </a:r>
           </a:p>
           <a:p>
             <a:pPr>
               <a:spcAft>
-                <a:spcPts val="600"/>
+                <a:spcPts val="500"/>
               </a:spcAft>
-              <a:defRPr sz="1250">
-                <a:solidFill>
-                  <a:srgbClr val="1E293B"/>
+              <a:defRPr sz="1200">
+                <a:solidFill>
+                  <a:srgbClr val="0F172A"/>
                 </a:solidFill>
               </a:defRPr>
             </a:pPr>
             <a:r>
-              <a:t>• Multi-Device Sync: Poor; state changes on one device not reflected on others</a:t>
-            </a:r>
-          </a:p>
-          <a:p>
-            <a:pPr>
-              <a:spcAft>
-                <a:spcPts val="600"/>
-              </a:spcAft>
-              <a:defRPr sz="1250">
-                <a:solidFill>
-                  <a:srgbClr val="1E293B"/>
-                </a:solidFill>
-              </a:defRPr>
-            </a:pPr>
-            <a:r>
-              <a:t>• Server Storage: Minimal server storage required; client maintains local archive</a:t>
-            </a:r>
-          </a:p>
-          <a:p>
-            <a:pPr>
-              <a:spcAft>
-                <a:spcPts val="600"/>
-              </a:spcAft>
-              <a:defRPr sz="1250">
-                <a:solidFill>
-                  <a:srgbClr val="1E293B"/>
-                </a:solidFill>
-              </a:defRPr>
-            </a:pPr>
-            <a:r>
-              <a:t>• Statelessness: Stateless across client sessions</a:t>
+              <a:t>• Base64 Encoding: Converts 3 binary bytes (24 bits) into 4 printable ASCII characters (6 bits each; 33% overhead)</a:t>
             </a:r>
           </a:p>
         </p:txBody>
@@ -4164,8 +4307,8 @@
         </p:nvSpPr>
         <p:spPr>
           <a:xfrm>
-            <a:off x="6309360" y="1280160"/>
-            <a:ext cx="5212080" cy="4846320"/>
+            <a:off x="6309360" y="1234440"/>
+            <a:ext cx="5212080" cy="4892040"/>
           </a:xfrm>
           <a:prstGeom prst="roundRect">
             <a:avLst/>
@@ -4175,7 +4318,7 @@
           </a:solidFill>
           <a:ln w="19050">
             <a:solidFill>
-              <a:srgbClr val="0F1E4A"/>
+              <a:srgbClr val="0E7490"/>
             </a:solidFill>
           </a:ln>
         </p:spPr>
@@ -4209,7 +4352,7 @@
         </p:nvSpPr>
         <p:spPr>
           <a:xfrm>
-            <a:off x="6492240" y="1417320"/>
+            <a:off x="6492240" y="1371600"/>
             <a:ext cx="4846320" cy="4572000"/>
           </a:xfrm>
           <a:prstGeom prst="rect">
@@ -4225,91 +4368,61 @@
           <a:p>
             <a:pPr>
               <a:spcAft>
-                <a:spcPts val="1200"/>
+                <a:spcPts val="1000"/>
               </a:spcAft>
-              <a:defRPr b="1" sz="1600">
+              <a:defRPr b="1" sz="1550">
                 <a:solidFill>
                   <a:srgbClr val="0E7490"/>
                 </a:solidFill>
               </a:defRPr>
             </a:pPr>
             <a:r>
-              <a:t>IMAP4 (Internet Message Access Protocol - Port 143)</a:t>
+              <a:t>Mail Access: POP3 vs IMAP4</a:t>
             </a:r>
           </a:p>
           <a:p>
             <a:pPr>
               <a:spcAft>
-                <a:spcPts val="600"/>
+                <a:spcPts val="500"/>
               </a:spcAft>
-              <a:defRPr sz="1250">
-                <a:solidFill>
-                  <a:srgbClr val="1E293B"/>
+              <a:defRPr sz="1200">
+                <a:solidFill>
+                  <a:srgbClr val="0F172A"/>
                 </a:solidFill>
               </a:defRPr>
             </a:pPr>
             <a:r>
-              <a:t>• Paradigm: Remote message management on server</a:t>
+              <a:t>• POP3 (Post Office Protocol v3): TCP Port 110. 'Download and Delete' mode — copies email to local device; no server synchronization</a:t>
             </a:r>
           </a:p>
           <a:p>
             <a:pPr>
               <a:spcAft>
-                <a:spcPts val="600"/>
+                <a:spcPts val="500"/>
               </a:spcAft>
-              <a:defRPr sz="1250">
-                <a:solidFill>
-                  <a:srgbClr val="1E293B"/>
+              <a:defRPr sz="1200">
+                <a:solidFill>
+                  <a:srgbClr val="0F172A"/>
                 </a:solidFill>
               </a:defRPr>
             </a:pPr>
             <a:r>
-              <a:t>• Folder Management: Allows creating, renaming, and nesting folders on server</a:t>
+              <a:t>• IMAP4 (Internet Message Access Protocol): TCP Port 143. Retains all messages/folders on server; multi-device synchronization; supports partial retrieval (e.g., fetch headers only)</a:t>
             </a:r>
           </a:p>
           <a:p>
             <a:pPr>
               <a:spcAft>
-                <a:spcPts val="600"/>
+                <a:spcPts val="500"/>
               </a:spcAft>
-              <a:defRPr sz="1250">
-                <a:solidFill>
-                  <a:srgbClr val="1E293B"/>
+              <a:defRPr sz="1200">
+                <a:solidFill>
+                  <a:srgbClr val="0F172A"/>
                 </a:solidFill>
               </a:defRPr>
             </a:pPr>
             <a:r>
-              <a:t>• Multi-Device Sync: Perfect synchronization across phone, laptop, webmail</a:t>
-            </a:r>
-          </a:p>
-          <a:p>
-            <a:pPr>
-              <a:spcAft>
-                <a:spcPts val="600"/>
-              </a:spcAft>
-              <a:defRPr sz="1250">
-                <a:solidFill>
-                  <a:srgbClr val="1E293B"/>
-                </a:solidFill>
-              </a:defRPr>
-            </a:pPr>
-            <a:r>
-              <a:t>• Partial Download: Allows fetching message headers before downloading body</a:t>
-            </a:r>
-          </a:p>
-          <a:p>
-            <a:pPr>
-              <a:spcAft>
-                <a:spcPts val="600"/>
-              </a:spcAft>
-              <a:defRPr sz="1250">
-                <a:solidFill>
-                  <a:srgbClr val="1E293B"/>
-                </a:solidFill>
-              </a:defRPr>
-            </a:pPr>
-            <a:r>
-              <a:t>• Stateful: Server tracks read, flagged, and deleted states</a:t>
+              <a:t>• Webmail (HTTP/HTTPS): User agent runs inside web browser; uses HTTPS to communicate with webmail server</a:t>
             </a:r>
           </a:p>
         </p:txBody>
@@ -4322,8 +4435,8 @@
         </p:nvSpPr>
         <p:spPr>
           <a:xfrm>
-            <a:off x="731520" y="6309360"/>
-            <a:ext cx="10789920" cy="365760"/>
+            <a:off x="731520" y="6327648"/>
+            <a:ext cx="10789920" cy="320040"/>
           </a:xfrm>
           <a:prstGeom prst="rect">
             <a:avLst/>
@@ -4345,6 +4458,41 @@
             </a:pPr>
             <a:r>
               <a:t>PCCST501 Computer Networks | KTU 2024 Scheme | Prof. Anju Markose | Assistant Professor, Dept. of CSE | VJCET</a:t>
+            </a:r>
+          </a:p>
+        </p:txBody>
+      </p:sp>
+      <p:sp>
+        <p:nvSpPr>
+          <p:cNvPr id="11" name="TextBox 10"/>
+          <p:cNvSpPr txBox="1"/>
+          <p:nvPr/>
+        </p:nvSpPr>
+        <p:spPr>
+          <a:xfrm>
+            <a:off x="6858000" y="6327648"/>
+            <a:ext cx="4572000" cy="320040"/>
+          </a:xfrm>
+          <a:prstGeom prst="rect">
+            <a:avLst/>
+          </a:prstGeom>
+          <a:noFill/>
+        </p:spPr>
+        <p:txBody>
+          <a:bodyPr wrap="none">
+            <a:spAutoFit/>
+          </a:bodyPr>
+          <a:lstStyle/>
+          <a:p>
+            <a:pPr algn="r">
+              <a:defRPr sz="950">
+                <a:solidFill>
+                  <a:srgbClr val="64748B"/>
+                </a:solidFill>
+              </a:defRPr>
+            </a:pPr>
+            <a:r>
+              <a:t>Dept. of CSE, VJCET</a:t>
             </a:r>
           </a:p>
         </p:txBody>
@@ -4476,14 +4624,14 @@
           <a:lstStyle/>
           <a:p>
             <a:pPr>
-              <a:defRPr b="1" sz="2300">
+              <a:defRPr b="1" sz="2100">
                 <a:solidFill>
                   <a:srgbClr val="F8FAFC"/>
                 </a:solidFill>
               </a:defRPr>
             </a:pPr>
             <a:r>
-              <a:t>1.6.3 MIME (Multipurpose Internet Mail Extensions)</a:t>
+              <a:t>🎯 Exam Booster &amp; Review: Electronic Mail Protocols</a:t>
             </a:r>
           </a:p>
         </p:txBody>
@@ -4518,204 +4666,31 @@
               </a:defRPr>
             </a:pPr>
             <a:r>
-              <a:t>M1.6 MIME EXTENSIONS</a:t>
-            </a:r>
-          </a:p>
-        </p:txBody>
-      </p:sp>
-      <p:sp>
-        <p:nvSpPr>
-          <p:cNvPr id="6" name="TextBox 5"/>
-          <p:cNvSpPr txBox="1"/>
-          <p:nvPr/>
-        </p:nvSpPr>
-        <p:spPr>
-          <a:xfrm>
-            <a:off x="731520" y="1280160"/>
-            <a:ext cx="6858000" cy="4937760"/>
-          </a:xfrm>
-          <a:prstGeom prst="rect">
-            <a:avLst/>
-          </a:prstGeom>
-          <a:noFill/>
-        </p:spPr>
-        <p:txBody>
-          <a:bodyPr wrap="square">
-            <a:spAutoFit/>
-          </a:bodyPr>
-          <a:lstStyle/>
-          <a:p>
-            <a:pPr>
-              <a:spcAft>
-                <a:spcPts val="200"/>
-              </a:spcAft>
-              <a:defRPr b="1" sz="1500">
-                <a:solidFill>
-                  <a:srgbClr val="0F1E4A"/>
-                </a:solidFill>
-              </a:defRPr>
-            </a:pPr>
-            <a:r>
-              <a:t>• Motivation</a:t>
-            </a:r>
-          </a:p>
-          <a:p>
-            <a:pPr>
-              <a:spcAft>
-                <a:spcPts val="800"/>
-              </a:spcAft>
-              <a:defRPr sz="1300">
-                <a:solidFill>
-                  <a:srgbClr val="1E293B"/>
-                </a:solidFill>
-              </a:defRPr>
-            </a:pPr>
-            <a:r>
-              <a:t>   Enables sending non-ASCII data (images, audio, video, attachments, non-English character sets) across standard 7-bit ASCII SMTP infrastructure.</a:t>
-            </a:r>
-          </a:p>
-          <a:p>
-            <a:pPr>
-              <a:spcAft>
-                <a:spcPts val="200"/>
-              </a:spcAft>
-              <a:defRPr b="1" sz="1500">
-                <a:solidFill>
-                  <a:srgbClr val="0F1E4A"/>
-                </a:solidFill>
-              </a:defRPr>
-            </a:pPr>
-            <a:r>
-              <a:t>• MIME Header Extensions</a:t>
-            </a:r>
-          </a:p>
-          <a:p>
-            <a:pPr>
-              <a:spcAft>
-                <a:spcPts val="800"/>
-              </a:spcAft>
-              <a:defRPr sz="1300">
-                <a:solidFill>
-                  <a:srgbClr val="1E293B"/>
-                </a:solidFill>
-              </a:defRPr>
-            </a:pPr>
-            <a:r>
-              <a:t>   `MIME-Version: 1.0`, `Content-Type:` (e.g. `text/html`, `image/jpeg`, `multipart/mixed`), `Content-Transfer-Encoding:`.</a:t>
-            </a:r>
-          </a:p>
-          <a:p>
-            <a:pPr>
-              <a:spcAft>
-                <a:spcPts val="200"/>
-              </a:spcAft>
-              <a:defRPr b="1" sz="1500">
-                <a:solidFill>
-                  <a:srgbClr val="0F1E4A"/>
-                </a:solidFill>
-              </a:defRPr>
-            </a:pPr>
-            <a:r>
-              <a:t>• Base64 Encoding</a:t>
-            </a:r>
-          </a:p>
-          <a:p>
-            <a:pPr>
-              <a:spcAft>
-                <a:spcPts val="800"/>
-              </a:spcAft>
-              <a:defRPr sz="1300">
-                <a:solidFill>
-                  <a:srgbClr val="1E293B"/>
-                </a:solidFill>
-              </a:defRPr>
-            </a:pPr>
-            <a:r>
-              <a:t>   Converts arbitrary binary data into 6-bit chunks mapped to 64 printable ASCII characters (`A-Z`, `a-z`, `0-9`, `+`, `/`). Every 3 binary bytes produce 4 ASCII chars (33% overhead).</a:t>
-            </a:r>
-          </a:p>
-          <a:p>
-            <a:pPr>
-              <a:spcAft>
-                <a:spcPts val="200"/>
-              </a:spcAft>
-              <a:defRPr b="1" sz="1500">
-                <a:solidFill>
-                  <a:srgbClr val="0F1E4A"/>
-                </a:solidFill>
-              </a:defRPr>
-            </a:pPr>
-            <a:r>
-              <a:t>• Quoted-Printable Encoding</a:t>
-            </a:r>
-          </a:p>
-          <a:p>
-            <a:pPr>
-              <a:spcAft>
-                <a:spcPts val="800"/>
-              </a:spcAft>
-              <a:defRPr sz="1300">
-                <a:solidFill>
-                  <a:srgbClr val="1E293B"/>
-                </a:solidFill>
-              </a:defRPr>
-            </a:pPr>
-            <a:r>
-              <a:t>   Used for text with few non-ASCII characters; non-ASCII byte represented as `=XX` (hex).</a:t>
-            </a:r>
-          </a:p>
-          <a:p>
-            <a:pPr>
-              <a:spcAft>
-                <a:spcPts val="200"/>
-              </a:spcAft>
-              <a:defRPr b="1" sz="1500">
-                <a:solidFill>
-                  <a:srgbClr val="0F1E4A"/>
-                </a:solidFill>
-              </a:defRPr>
-            </a:pPr>
-            <a:r>
-              <a:t>• Multipart MIME</a:t>
-            </a:r>
-          </a:p>
-          <a:p>
-            <a:pPr>
-              <a:spcAft>
-                <a:spcPts val="800"/>
-              </a:spcAft>
-              <a:defRPr sz="1300">
-                <a:solidFill>
-                  <a:srgbClr val="1E293B"/>
-                </a:solidFill>
-              </a:defRPr>
-            </a:pPr>
-            <a:r>
-              <a:t>   Allows single email message to contain plain text, HTML version, and multiple attached binary files separated by a boundary string.</a:t>
-            </a:r>
-          </a:p>
-        </p:txBody>
-      </p:sp>
-      <p:sp>
-        <p:nvSpPr>
-          <p:cNvPr id="7" name="Rounded Rectangle 6"/>
+              <a:t>M1.6</a:t>
+            </a:r>
+          </a:p>
+        </p:txBody>
+      </p:sp>
+      <p:sp>
+        <p:nvSpPr>
+          <p:cNvPr id="6" name="Rounded Rectangle 5"/>
           <p:cNvSpPr/>
           <p:nvPr/>
         </p:nvSpPr>
         <p:spPr>
           <a:xfrm>
-            <a:off x="7955279" y="1280160"/>
-            <a:ext cx="3566160" cy="4846320"/>
+            <a:off x="731520" y="1234440"/>
+            <a:ext cx="5303520" cy="4892040"/>
           </a:xfrm>
           <a:prstGeom prst="roundRect">
             <a:avLst/>
           </a:prstGeom>
           <a:solidFill>
-            <a:srgbClr val="F1F5F9"/>
+            <a:srgbClr val="FEF3C7"/>
           </a:solidFill>
           <a:ln w="19050">
             <a:solidFill>
-              <a:srgbClr val="0E7490"/>
+              <a:srgbClr val="D97706"/>
             </a:solidFill>
           </a:ln>
         </p:spPr>
@@ -4743,14 +4718,14 @@
       </p:sp>
       <p:sp>
         <p:nvSpPr>
-          <p:cNvPr id="8" name="TextBox 7"/>
+          <p:cNvPr id="7" name="TextBox 6"/>
           <p:cNvSpPr txBox="1"/>
           <p:nvPr/>
         </p:nvSpPr>
         <p:spPr>
           <a:xfrm>
-            <a:off x="8138160" y="1417320"/>
-            <a:ext cx="3200400" cy="4572000"/>
+            <a:off x="914400" y="1371600"/>
+            <a:ext cx="4937760" cy="4572000"/>
           </a:xfrm>
           <a:prstGeom prst="rect">
             <a:avLst/>
@@ -4767,14 +4742,142 @@
               <a:spcAft>
                 <a:spcPts val="1000"/>
               </a:spcAft>
-              <a:defRPr b="1" sz="1500">
+              <a:defRPr b="1" sz="1450">
+                <a:solidFill>
+                  <a:srgbClr val="D97706"/>
+                </a:solidFill>
+              </a:defRPr>
+            </a:pPr>
+            <a:r>
+              <a:t>📚 KTU High-Yield Questions (K2 Understand)</a:t>
+            </a:r>
+          </a:p>
+          <a:p>
+            <a:pPr>
+              <a:spcAft>
+                <a:spcPts val="700"/>
+              </a:spcAft>
+              <a:defRPr sz="1200">
+                <a:solidFill>
+                  <a:srgbClr val="0F172A"/>
+                </a:solidFill>
+              </a:defRPr>
+            </a:pPr>
+            <a:r>
+              <a:t>Q: Explain why SMTP cannot be used by an end user to pull emails from the mail server. (5 Marks)</a:t>
+            </a:r>
+          </a:p>
+          <a:p>
+            <a:pPr>
+              <a:spcAft>
+                <a:spcPts val="700"/>
+              </a:spcAft>
+              <a:defRPr sz="1200">
+                <a:solidFill>
+                  <a:srgbClr val="0F172A"/>
+                </a:solidFill>
+              </a:defRPr>
+            </a:pPr>
+            <a:r>
+              <a:t>Q: Differentiate between POP3 and IMAP4 access protocols with respect to folder synchronization and multi-device access. (6 Marks)</a:t>
+            </a:r>
+          </a:p>
+          <a:p>
+            <a:pPr>
+              <a:spcAft>
+                <a:spcPts val="700"/>
+              </a:spcAft>
+              <a:defRPr sz="1200">
+                <a:solidFill>
+                  <a:srgbClr val="0F172A"/>
+                </a:solidFill>
+              </a:defRPr>
+            </a:pPr>
+            <a:r>
+              <a:t>Q: Explain the role of MIME in electronic mail. How does Base64 encoding convert 8-bit binary data to 7-bit ASCII? (6 Marks)</a:t>
+            </a:r>
+          </a:p>
+        </p:txBody>
+      </p:sp>
+      <p:sp>
+        <p:nvSpPr>
+          <p:cNvPr id="8" name="Rounded Rectangle 7"/>
+          <p:cNvSpPr/>
+          <p:nvPr/>
+        </p:nvSpPr>
+        <p:spPr>
+          <a:xfrm>
+            <a:off x="6309360" y="1234440"/>
+            <a:ext cx="5212080" cy="4892040"/>
+          </a:xfrm>
+          <a:prstGeom prst="roundRect">
+            <a:avLst/>
+          </a:prstGeom>
+          <a:solidFill>
+            <a:srgbClr val="EEF2FF"/>
+          </a:solidFill>
+          <a:ln w="19050">
+            <a:solidFill>
+              <a:srgbClr val="0E7490"/>
+            </a:solidFill>
+          </a:ln>
+        </p:spPr>
+        <p:style>
+          <a:lnRef idx="1">
+            <a:schemeClr val="accent1"/>
+          </a:lnRef>
+          <a:fillRef idx="3">
+            <a:schemeClr val="accent1"/>
+          </a:fillRef>
+          <a:effectRef idx="2">
+            <a:schemeClr val="accent1"/>
+          </a:effectRef>
+          <a:fontRef idx="minor">
+            <a:schemeClr val="lt1"/>
+          </a:fontRef>
+        </p:style>
+        <p:txBody>
+          <a:bodyPr rtlCol="0" anchor="ctr"/>
+          <a:lstStyle/>
+          <a:p>
+            <a:pPr algn="ctr"/>
+          </a:p>
+        </p:txBody>
+      </p:sp>
+      <p:sp>
+        <p:nvSpPr>
+          <p:cNvPr id="9" name="TextBox 8"/>
+          <p:cNvSpPr txBox="1"/>
+          <p:nvPr/>
+        </p:nvSpPr>
+        <p:spPr>
+          <a:xfrm>
+            <a:off x="6492240" y="1371600"/>
+            <a:ext cx="4846320" cy="4572000"/>
+          </a:xfrm>
+          <a:prstGeom prst="rect">
+            <a:avLst/>
+          </a:prstGeom>
+          <a:noFill/>
+        </p:spPr>
+        <p:txBody>
+          <a:bodyPr wrap="square">
+            <a:spAutoFit/>
+          </a:bodyPr>
+          <a:lstStyle/>
+          <a:p>
+            <a:pPr>
+              <a:spcAft>
+                <a:spcPts val="1000"/>
+              </a:spcAft>
+              <a:defRPr b="1" sz="1450">
                 <a:solidFill>
                   <a:srgbClr val="0E7490"/>
                 </a:solidFill>
               </a:defRPr>
             </a:pPr>
             <a:r>
-              <a:t>Push vs Pull Summary</a:t>
+              <a:t>💡 Critical Conceptual Takeaways</a:t>
             </a:r>
           </a:p>
           <a:p>
@@ -4784,12 +4887,12 @@
               </a:spcAft>
               <a:defRPr sz="1200">
                 <a:solidFill>
-                  <a:srgbClr val="1E293B"/>
+                  <a:srgbClr val="0F172A"/>
                 </a:solidFill>
               </a:defRPr>
             </a:pPr>
             <a:r>
-              <a:t>→ Sender UA -&gt; Sender Server: SMTP (Push)</a:t>
+              <a:t>✔ SMTP is strictly a push protocol; POP3 and IMAP4 are pull protocols.</a:t>
             </a:r>
           </a:p>
           <a:p>
@@ -4799,12 +4902,12 @@
               </a:spcAft>
               <a:defRPr sz="1200">
                 <a:solidFill>
-                  <a:srgbClr val="1E293B"/>
+                  <a:srgbClr val="0F172A"/>
                 </a:solidFill>
               </a:defRPr>
             </a:pPr>
             <a:r>
-              <a:t>→ Sender Server -&gt; Recv Server: SMTP (Push)</a:t>
+              <a:t>✔ POP3 is simple and offline-oriented; IMAP4 maintains centralized state and synchronized folders across devices.</a:t>
             </a:r>
           </a:p>
           <a:p>
@@ -4814,41 +4917,26 @@
               </a:spcAft>
               <a:defRPr sz="1200">
                 <a:solidFill>
-                  <a:srgbClr val="1E293B"/>
+                  <a:srgbClr val="0F172A"/>
                 </a:solidFill>
               </a:defRPr>
             </a:pPr>
             <a:r>
-              <a:t>→ Recv Server -&gt; Recv UA: POP3/IMAP (Pull)</a:t>
-            </a:r>
-          </a:p>
-          <a:p>
-            <a:pPr>
-              <a:spcAft>
-                <a:spcPts val="600"/>
-              </a:spcAft>
-              <a:defRPr sz="1200">
-                <a:solidFill>
-                  <a:srgbClr val="1E293B"/>
-                </a:solidFill>
-              </a:defRPr>
-            </a:pPr>
-            <a:r>
-              <a:t>→ Webmail: HTTP between UA and Server</a:t>
-            </a:r>
-          </a:p>
-        </p:txBody>
-      </p:sp>
-      <p:sp>
-        <p:nvSpPr>
-          <p:cNvPr id="9" name="TextBox 8"/>
+              <a:t>✔ MIME headers allow multimedia attachments; Base64 maps 3 binary bytes into 4 ASCII symbols.</a:t>
+            </a:r>
+          </a:p>
+        </p:txBody>
+      </p:sp>
+      <p:sp>
+        <p:nvSpPr>
+          <p:cNvPr id="10" name="TextBox 9"/>
           <p:cNvSpPr txBox="1"/>
           <p:nvPr/>
         </p:nvSpPr>
         <p:spPr>
           <a:xfrm>
-            <a:off x="731520" y="6309360"/>
-            <a:ext cx="10789920" cy="365760"/>
+            <a:off x="731520" y="6327648"/>
+            <a:ext cx="10789920" cy="320040"/>
           </a:xfrm>
           <a:prstGeom prst="rect">
             <a:avLst/>
@@ -4870,6 +4958,41 @@
             </a:pPr>
             <a:r>
               <a:t>PCCST501 Computer Networks | KTU 2024 Scheme | Prof. Anju Markose | Assistant Professor, Dept. of CSE | VJCET</a:t>
+            </a:r>
+          </a:p>
+        </p:txBody>
+      </p:sp>
+      <p:sp>
+        <p:nvSpPr>
+          <p:cNvPr id="11" name="TextBox 10"/>
+          <p:cNvSpPr txBox="1"/>
+          <p:nvPr/>
+        </p:nvSpPr>
+        <p:spPr>
+          <a:xfrm>
+            <a:off x="6858000" y="6327648"/>
+            <a:ext cx="4572000" cy="320040"/>
+          </a:xfrm>
+          <a:prstGeom prst="rect">
+            <a:avLst/>
+          </a:prstGeom>
+          <a:noFill/>
+        </p:spPr>
+        <p:txBody>
+          <a:bodyPr wrap="none">
+            <a:spAutoFit/>
+          </a:bodyPr>
+          <a:lstStyle/>
+          <a:p>
+            <a:pPr algn="r">
+              <a:defRPr sz="950">
+                <a:solidFill>
+                  <a:srgbClr val="64748B"/>
+                </a:solidFill>
+              </a:defRPr>
+            </a:pPr>
+            <a:r>
+              <a:t>Dept. of CSE, VJCET</a:t>
             </a:r>
           </a:p>
         </p:txBody>
